--- a/ゲーム科2年/00_前期/ゲーム開発Ⅱ/00_ステージとの当たり判定.pptx
+++ b/ゲーム科2年/00_前期/ゲーム開発Ⅱ/00_ステージとの当たり判定.pptx
@@ -20,7 +20,8 @@
     <p:sldId id="269" r:id="rId14"/>
     <p:sldId id="270" r:id="rId15"/>
     <p:sldId id="271" r:id="rId16"/>
-    <p:sldId id="272" r:id="rId17"/>
+    <p:sldId id="273" r:id="rId17"/>
+    <p:sldId id="272" r:id="rId18"/>
   </p:sldIdLst>
   <p:sldSz cx="12192000" cy="6858000"/>
   <p:notesSz cx="6858000" cy="9144000"/>
@@ -274,7 +275,7 @@
           <a:p>
             <a:fld id="{E9CC885B-4903-4D54-9A93-00025F12DED9}" type="datetimeFigureOut">
               <a:rPr kumimoji="1" lang="ja-JP" altLang="en-US" smtClean="0"/>
-              <a:t>2024/12/19</a:t>
+              <a:t>2026/2/25</a:t>
             </a:fld>
             <a:endParaRPr kumimoji="1" lang="ja-JP" altLang="en-US"/>
           </a:p>
@@ -504,7 +505,7 @@
           <a:p>
             <a:fld id="{E9CC885B-4903-4D54-9A93-00025F12DED9}" type="datetimeFigureOut">
               <a:rPr kumimoji="1" lang="ja-JP" altLang="en-US" smtClean="0"/>
-              <a:t>2024/12/19</a:t>
+              <a:t>2026/2/25</a:t>
             </a:fld>
             <a:endParaRPr kumimoji="1" lang="ja-JP" altLang="en-US"/>
           </a:p>
@@ -744,7 +745,7 @@
           <a:p>
             <a:fld id="{E9CC885B-4903-4D54-9A93-00025F12DED9}" type="datetimeFigureOut">
               <a:rPr kumimoji="1" lang="ja-JP" altLang="en-US" smtClean="0"/>
-              <a:t>2024/12/19</a:t>
+              <a:t>2026/2/25</a:t>
             </a:fld>
             <a:endParaRPr kumimoji="1" lang="ja-JP" altLang="en-US"/>
           </a:p>
@@ -974,7 +975,7 @@
           <a:p>
             <a:fld id="{E9CC885B-4903-4D54-9A93-00025F12DED9}" type="datetimeFigureOut">
               <a:rPr kumimoji="1" lang="ja-JP" altLang="en-US" smtClean="0"/>
-              <a:t>2024/12/19</a:t>
+              <a:t>2026/2/25</a:t>
             </a:fld>
             <a:endParaRPr kumimoji="1" lang="ja-JP" altLang="en-US"/>
           </a:p>
@@ -1249,7 +1250,7 @@
           <a:p>
             <a:fld id="{E9CC885B-4903-4D54-9A93-00025F12DED9}" type="datetimeFigureOut">
               <a:rPr kumimoji="1" lang="ja-JP" altLang="en-US" smtClean="0"/>
-              <a:t>2024/12/19</a:t>
+              <a:t>2026/2/25</a:t>
             </a:fld>
             <a:endParaRPr kumimoji="1" lang="ja-JP" altLang="en-US"/>
           </a:p>
@@ -1578,7 +1579,7 @@
           <a:p>
             <a:fld id="{E9CC885B-4903-4D54-9A93-00025F12DED9}" type="datetimeFigureOut">
               <a:rPr kumimoji="1" lang="ja-JP" altLang="en-US" smtClean="0"/>
-              <a:t>2024/12/19</a:t>
+              <a:t>2026/2/25</a:t>
             </a:fld>
             <a:endParaRPr kumimoji="1" lang="ja-JP" altLang="en-US"/>
           </a:p>
@@ -2054,7 +2055,7 @@
           <a:p>
             <a:fld id="{E9CC885B-4903-4D54-9A93-00025F12DED9}" type="datetimeFigureOut">
               <a:rPr kumimoji="1" lang="ja-JP" altLang="en-US" smtClean="0"/>
-              <a:t>2024/12/19</a:t>
+              <a:t>2026/2/25</a:t>
             </a:fld>
             <a:endParaRPr kumimoji="1" lang="ja-JP" altLang="en-US"/>
           </a:p>
@@ -2195,7 +2196,7 @@
           <a:p>
             <a:fld id="{E9CC885B-4903-4D54-9A93-00025F12DED9}" type="datetimeFigureOut">
               <a:rPr kumimoji="1" lang="ja-JP" altLang="en-US" smtClean="0"/>
-              <a:t>2024/12/19</a:t>
+              <a:t>2026/2/25</a:t>
             </a:fld>
             <a:endParaRPr kumimoji="1" lang="ja-JP" altLang="en-US"/>
           </a:p>
@@ -2308,7 +2309,7 @@
           <a:p>
             <a:fld id="{E9CC885B-4903-4D54-9A93-00025F12DED9}" type="datetimeFigureOut">
               <a:rPr kumimoji="1" lang="ja-JP" altLang="en-US" smtClean="0"/>
-              <a:t>2024/12/19</a:t>
+              <a:t>2026/2/25</a:t>
             </a:fld>
             <a:endParaRPr kumimoji="1" lang="ja-JP" altLang="en-US"/>
           </a:p>
@@ -2651,7 +2652,7 @@
           <a:p>
             <a:fld id="{E9CC885B-4903-4D54-9A93-00025F12DED9}" type="datetimeFigureOut">
               <a:rPr kumimoji="1" lang="ja-JP" altLang="en-US" smtClean="0"/>
-              <a:t>2024/12/19</a:t>
+              <a:t>2026/2/25</a:t>
             </a:fld>
             <a:endParaRPr kumimoji="1" lang="ja-JP" altLang="en-US"/>
           </a:p>
@@ -2939,7 +2940,7 @@
           <a:p>
             <a:fld id="{E9CC885B-4903-4D54-9A93-00025F12DED9}" type="datetimeFigureOut">
               <a:rPr kumimoji="1" lang="ja-JP" altLang="en-US" smtClean="0"/>
-              <a:t>2024/12/19</a:t>
+              <a:t>2026/2/25</a:t>
             </a:fld>
             <a:endParaRPr kumimoji="1" lang="ja-JP" altLang="en-US"/>
           </a:p>
@@ -3212,7 +3213,7 @@
           <a:p>
             <a:fld id="{E9CC885B-4903-4D54-9A93-00025F12DED9}" type="datetimeFigureOut">
               <a:rPr kumimoji="1" lang="ja-JP" altLang="en-US" smtClean="0"/>
-              <a:t>2024/12/19</a:t>
+              <a:t>2026/2/25</a:t>
             </a:fld>
             <a:endParaRPr kumimoji="1" lang="ja-JP" altLang="en-US"/>
           </a:p>
@@ -5369,6 +5370,261 @@
         <p:spPr>
           <a:xfrm>
             <a:off x="567542" y="1216429"/>
+            <a:ext cx="8186857" cy="830997"/>
+          </a:xfrm>
+          <a:prstGeom prst="rect">
+            <a:avLst/>
+          </a:prstGeom>
+          <a:noFill/>
+        </p:spPr>
+        <p:txBody>
+          <a:bodyPr wrap="none" rtlCol="0">
+            <a:spAutoFit/>
+          </a:bodyPr>
+          <a:lstStyle/>
+          <a:p>
+            <a:r>
+              <a:rPr lang="ja-JP" altLang="en-US" sz="2400" dirty="0"/>
+              <a:t>当たり判定の処理が終わったら、衝突情報を削除します。</a:t>
+            </a:r>
+            <a:endParaRPr lang="en-US" altLang="ja-JP" sz="2400" dirty="0"/>
+          </a:p>
+          <a:p>
+            <a:r>
+              <a:rPr lang="en-US" altLang="ja-JP" sz="2400" dirty="0" err="1"/>
+              <a:t>DxLib</a:t>
+            </a:r>
+            <a:r>
+              <a:rPr lang="ja-JP" altLang="en-US" sz="2400" dirty="0"/>
+              <a:t>の関数を使えば削除できます。</a:t>
+            </a:r>
+            <a:endParaRPr lang="en-US" altLang="ja-JP" sz="2400" dirty="0"/>
+          </a:p>
+        </p:txBody>
+      </p:sp>
+      <p:sp>
+        <p:nvSpPr>
+          <p:cNvPr id="8" name="テキスト ボックス 7">
+            <a:extLst>
+              <a:ext uri="{FF2B5EF4-FFF2-40B4-BE49-F238E27FC236}">
+                <a16:creationId xmlns:a16="http://schemas.microsoft.com/office/drawing/2014/main" id="{2417FBE2-791C-492C-9BBA-875F97618BAF}"/>
+              </a:ext>
+            </a:extLst>
+          </p:cNvPr>
+          <p:cNvSpPr txBox="1"/>
+          <p:nvPr/>
+        </p:nvSpPr>
+        <p:spPr>
+          <a:xfrm>
+            <a:off x="567542" y="4116613"/>
+            <a:ext cx="7529625" cy="461665"/>
+          </a:xfrm>
+          <a:prstGeom prst="rect">
+            <a:avLst/>
+          </a:prstGeom>
+          <a:noFill/>
+        </p:spPr>
+        <p:txBody>
+          <a:bodyPr wrap="none" rtlCol="0">
+            <a:spAutoFit/>
+          </a:bodyPr>
+          <a:lstStyle/>
+          <a:p>
+            <a:r>
+              <a:rPr lang="en-US" altLang="ja-JP" sz="2400" dirty="0"/>
+              <a:t>※</a:t>
+            </a:r>
+            <a:r>
+              <a:rPr lang="ja-JP" altLang="en-US" sz="2400" dirty="0"/>
+              <a:t>削除が必要なのは</a:t>
+            </a:r>
+            <a:r>
+              <a:rPr lang="en-US" altLang="ja-JP" sz="2400" b="1" dirty="0">
+                <a:solidFill>
+                  <a:srgbClr val="FF0000"/>
+                </a:solidFill>
+              </a:rPr>
+              <a:t>Dim</a:t>
+            </a:r>
+            <a:r>
+              <a:rPr lang="ja-JP" altLang="en-US" sz="2400" b="1" dirty="0">
+                <a:solidFill>
+                  <a:srgbClr val="FF0000"/>
+                </a:solidFill>
+              </a:rPr>
+              <a:t>の大きさが動的</a:t>
+            </a:r>
+            <a:r>
+              <a:rPr lang="ja-JP" altLang="en-US" sz="2400" dirty="0"/>
+              <a:t>だからです。</a:t>
+            </a:r>
+            <a:endParaRPr lang="en-US" altLang="ja-JP" sz="2400" dirty="0"/>
+          </a:p>
+        </p:txBody>
+      </p:sp>
+      <p:pic>
+        <p:nvPicPr>
+          <p:cNvPr id="3" name="図 2">
+            <a:extLst>
+              <a:ext uri="{FF2B5EF4-FFF2-40B4-BE49-F238E27FC236}">
+                <a16:creationId xmlns:a16="http://schemas.microsoft.com/office/drawing/2014/main" id="{E139191E-6854-47B1-9357-037C28918123}"/>
+              </a:ext>
+            </a:extLst>
+          </p:cNvPr>
+          <p:cNvPicPr>
+            <a:picLocks noChangeAspect="1"/>
+          </p:cNvPicPr>
+          <p:nvPr/>
+        </p:nvPicPr>
+        <p:blipFill>
+          <a:blip r:embed="rId2"/>
+          <a:stretch>
+            <a:fillRect/>
+          </a:stretch>
+        </p:blipFill>
+        <p:spPr>
+          <a:xfrm>
+            <a:off x="567542" y="2391833"/>
+            <a:ext cx="6962712" cy="1611206"/>
+          </a:xfrm>
+          <a:prstGeom prst="rect">
+            <a:avLst/>
+          </a:prstGeom>
+        </p:spPr>
+      </p:pic>
+      <p:sp>
+        <p:nvSpPr>
+          <p:cNvPr id="9" name="正方形/長方形 8">
+            <a:extLst>
+              <a:ext uri="{FF2B5EF4-FFF2-40B4-BE49-F238E27FC236}">
+                <a16:creationId xmlns:a16="http://schemas.microsoft.com/office/drawing/2014/main" id="{4E4F4D7A-B07F-4F24-A260-C390B2C86C2B}"/>
+              </a:ext>
+            </a:extLst>
+          </p:cNvPr>
+          <p:cNvSpPr/>
+          <p:nvPr/>
+        </p:nvSpPr>
+        <p:spPr>
+          <a:xfrm>
+            <a:off x="2192866" y="3013501"/>
+            <a:ext cx="6087534" cy="830998"/>
+          </a:xfrm>
+          <a:prstGeom prst="rect">
+            <a:avLst/>
+          </a:prstGeom>
+          <a:noFill/>
+          <a:ln w="38100">
+            <a:solidFill>
+              <a:srgbClr val="FF0000"/>
+            </a:solidFill>
+          </a:ln>
+        </p:spPr>
+        <p:style>
+          <a:lnRef idx="2">
+            <a:schemeClr val="accent1">
+              <a:shade val="50000"/>
+            </a:schemeClr>
+          </a:lnRef>
+          <a:fillRef idx="1">
+            <a:schemeClr val="accent1"/>
+          </a:fillRef>
+          <a:effectRef idx="0">
+            <a:schemeClr val="accent1"/>
+          </a:effectRef>
+          <a:fontRef idx="minor">
+            <a:schemeClr val="lt1"/>
+          </a:fontRef>
+        </p:style>
+        <p:txBody>
+          <a:bodyPr rtlCol="0" anchor="ctr"/>
+          <a:lstStyle/>
+          <a:p>
+            <a:pPr algn="ctr"/>
+            <a:endParaRPr kumimoji="1" lang="ja-JP" altLang="en-US"/>
+          </a:p>
+        </p:txBody>
+      </p:sp>
+    </p:spTree>
+    <p:extLst>
+      <p:ext uri="{BB962C8B-B14F-4D97-AF65-F5344CB8AC3E}">
+        <p14:creationId xmlns:p14="http://schemas.microsoft.com/office/powerpoint/2010/main" val="4070239863"/>
+      </p:ext>
+    </p:extLst>
+  </p:cSld>
+  <p:clrMapOvr>
+    <a:masterClrMapping/>
+  </p:clrMapOvr>
+</p:sld>
+</file>
+
+<file path=ppt/slides/slide17.xml><?xml version="1.0" encoding="utf-8"?>
+<p:sld xmlns:a="http://schemas.openxmlformats.org/drawingml/2006/main" xmlns:r="http://schemas.openxmlformats.org/officeDocument/2006/relationships" xmlns:p="http://schemas.openxmlformats.org/presentationml/2006/main">
+  <p:cSld>
+    <p:spTree>
+      <p:nvGrpSpPr>
+        <p:cNvPr id="1" name=""/>
+        <p:cNvGrpSpPr/>
+        <p:nvPr/>
+      </p:nvGrpSpPr>
+      <p:grpSpPr>
+        <a:xfrm>
+          <a:off x="0" y="0"/>
+          <a:ext cx="0" cy="0"/>
+          <a:chOff x="0" y="0"/>
+          <a:chExt cx="0" cy="0"/>
+        </a:xfrm>
+      </p:grpSpPr>
+      <p:sp>
+        <p:nvSpPr>
+          <p:cNvPr id="4" name="テキスト ボックス 3">
+            <a:extLst>
+              <a:ext uri="{FF2B5EF4-FFF2-40B4-BE49-F238E27FC236}">
+                <a16:creationId xmlns:a16="http://schemas.microsoft.com/office/drawing/2014/main" id="{5A13BF46-B8C5-48AA-8308-C9ECFF431A18}"/>
+              </a:ext>
+            </a:extLst>
+          </p:cNvPr>
+          <p:cNvSpPr txBox="1"/>
+          <p:nvPr/>
+        </p:nvSpPr>
+        <p:spPr>
+          <a:xfrm>
+            <a:off x="567542" y="491954"/>
+            <a:ext cx="4698722" cy="584775"/>
+          </a:xfrm>
+          <a:prstGeom prst="rect">
+            <a:avLst/>
+          </a:prstGeom>
+          <a:noFill/>
+        </p:spPr>
+        <p:txBody>
+          <a:bodyPr wrap="none" rtlCol="0">
+            <a:spAutoFit/>
+          </a:bodyPr>
+          <a:lstStyle/>
+          <a:p>
+            <a:r>
+              <a:rPr kumimoji="1" lang="ja-JP" altLang="en-US" sz="3200" b="1" u="sng" dirty="0"/>
+              <a:t>ステージとの当たり判定</a:t>
+            </a:r>
+            <a:endParaRPr kumimoji="1" lang="en-US" altLang="ja-JP" sz="3200" b="1" u="sng" dirty="0"/>
+          </a:p>
+        </p:txBody>
+      </p:sp>
+      <p:sp>
+        <p:nvSpPr>
+          <p:cNvPr id="6" name="テキスト ボックス 5">
+            <a:extLst>
+              <a:ext uri="{FF2B5EF4-FFF2-40B4-BE49-F238E27FC236}">
+                <a16:creationId xmlns:a16="http://schemas.microsoft.com/office/drawing/2014/main" id="{55830AD6-028B-4C4E-80BF-B70DFC1C3A46}"/>
+              </a:ext>
+            </a:extLst>
+          </p:cNvPr>
+          <p:cNvSpPr txBox="1"/>
+          <p:nvPr/>
+        </p:nvSpPr>
+        <p:spPr>
+          <a:xfrm>
+            <a:off x="567542" y="1216429"/>
             <a:ext cx="10033516" cy="3785652"/>
           </a:xfrm>
           <a:prstGeom prst="rect">
@@ -6656,12 +6912,48 @@
           </a:p>
         </p:txBody>
       </p:sp>
+      <p:sp>
+        <p:nvSpPr>
+          <p:cNvPr id="11" name="テキスト ボックス 10">
+            <a:extLst>
+              <a:ext uri="{FF2B5EF4-FFF2-40B4-BE49-F238E27FC236}">
+                <a16:creationId xmlns:a16="http://schemas.microsoft.com/office/drawing/2014/main" id="{F1F850A5-24CF-429F-8B06-17C5B7FBE138}"/>
+              </a:ext>
+            </a:extLst>
+          </p:cNvPr>
+          <p:cNvSpPr txBox="1"/>
+          <p:nvPr/>
+        </p:nvSpPr>
+        <p:spPr>
+          <a:xfrm>
+            <a:off x="567542" y="3687231"/>
+            <a:ext cx="6647974" cy="461665"/>
+          </a:xfrm>
+          <a:prstGeom prst="rect">
+            <a:avLst/>
+          </a:prstGeom>
+          <a:noFill/>
+        </p:spPr>
+        <p:txBody>
+          <a:bodyPr wrap="none" rtlCol="0">
+            <a:spAutoFit/>
+          </a:bodyPr>
+          <a:lstStyle/>
+          <a:p>
+            <a:r>
+              <a:rPr lang="ja-JP" altLang="en-US" sz="2400" dirty="0"/>
+              <a:t>非常に重要な関数なので詳しく見ていきます。</a:t>
+            </a:r>
+            <a:endParaRPr kumimoji="1" lang="en-US" altLang="ja-JP" sz="2400" dirty="0"/>
+          </a:p>
+        </p:txBody>
+      </p:sp>
       <p:pic>
         <p:nvPicPr>
-          <p:cNvPr id="5" name="図 4">
-            <a:extLst>
-              <a:ext uri="{FF2B5EF4-FFF2-40B4-BE49-F238E27FC236}">
-                <a16:creationId xmlns:a16="http://schemas.microsoft.com/office/drawing/2014/main" id="{34900A70-036B-439A-97A9-930AC4BFAC3E}"/>
+          <p:cNvPr id="3" name="図 2">
+            <a:extLst>
+              <a:ext uri="{FF2B5EF4-FFF2-40B4-BE49-F238E27FC236}">
+                <a16:creationId xmlns:a16="http://schemas.microsoft.com/office/drawing/2014/main" id="{A939961C-3297-49D9-8A6F-3E8924195DDD}"/>
               </a:ext>
             </a:extLst>
           </p:cNvPr>
@@ -6678,8 +6970,8 @@
         </p:blipFill>
         <p:spPr>
           <a:xfrm>
-            <a:off x="567542" y="2187126"/>
-            <a:ext cx="10834507" cy="2469541"/>
+            <a:off x="567542" y="2187125"/>
+            <a:ext cx="10343787" cy="1360407"/>
           </a:xfrm>
           <a:prstGeom prst="rect">
             <a:avLst/>
@@ -6688,10 +6980,10 @@
       </p:pic>
       <p:sp>
         <p:nvSpPr>
-          <p:cNvPr id="9" name="正方形/長方形 8">
-            <a:extLst>
-              <a:ext uri="{FF2B5EF4-FFF2-40B4-BE49-F238E27FC236}">
-                <a16:creationId xmlns:a16="http://schemas.microsoft.com/office/drawing/2014/main" id="{6279520F-F88C-435A-9CD0-55E6B2E99B42}"/>
+          <p:cNvPr id="10" name="正方形/長方形 9">
+            <a:extLst>
+              <a:ext uri="{FF2B5EF4-FFF2-40B4-BE49-F238E27FC236}">
+                <a16:creationId xmlns:a16="http://schemas.microsoft.com/office/drawing/2014/main" id="{F6D9C4EB-DAC3-404C-BC49-121E41644749}"/>
               </a:ext>
             </a:extLst>
           </p:cNvPr>
@@ -6700,8 +6992,8 @@
         </p:nvSpPr>
         <p:spPr>
           <a:xfrm>
-            <a:off x="1938867" y="2624667"/>
-            <a:ext cx="9203266" cy="1507066"/>
+            <a:off x="2040466" y="2627393"/>
+            <a:ext cx="9203266" cy="830998"/>
           </a:xfrm>
           <a:prstGeom prst="rect">
             <a:avLst/>
@@ -6735,42 +7027,6 @@
           <a:p>
             <a:pPr algn="ctr"/>
             <a:endParaRPr kumimoji="1" lang="ja-JP" altLang="en-US"/>
-          </a:p>
-        </p:txBody>
-      </p:sp>
-      <p:sp>
-        <p:nvSpPr>
-          <p:cNvPr id="11" name="テキスト ボックス 10">
-            <a:extLst>
-              <a:ext uri="{FF2B5EF4-FFF2-40B4-BE49-F238E27FC236}">
-                <a16:creationId xmlns:a16="http://schemas.microsoft.com/office/drawing/2014/main" id="{F1F850A5-24CF-429F-8B06-17C5B7FBE138}"/>
-              </a:ext>
-            </a:extLst>
-          </p:cNvPr>
-          <p:cNvSpPr txBox="1"/>
-          <p:nvPr/>
-        </p:nvSpPr>
-        <p:spPr>
-          <a:xfrm>
-            <a:off x="567542" y="4796367"/>
-            <a:ext cx="6647974" cy="461665"/>
-          </a:xfrm>
-          <a:prstGeom prst="rect">
-            <a:avLst/>
-          </a:prstGeom>
-          <a:noFill/>
-        </p:spPr>
-        <p:txBody>
-          <a:bodyPr wrap="none" rtlCol="0">
-            <a:spAutoFit/>
-          </a:bodyPr>
-          <a:lstStyle/>
-          <a:p>
-            <a:r>
-              <a:rPr lang="ja-JP" altLang="en-US" sz="2400" dirty="0"/>
-              <a:t>非常に重要な関数なので詳しく見ていきます。</a:t>
-            </a:r>
-            <a:endParaRPr kumimoji="1" lang="en-US" altLang="ja-JP" sz="2400" dirty="0"/>
           </a:p>
         </p:txBody>
       </p:sp>
